--- a/Diploma Bitcoin/Capítulo 3 — A história do dinheiro/DB 2025 Capítulo 3 — Sessão prática.pptx
+++ b/Diploma Bitcoin/Capítulo 3 — A história do dinheiro/DB 2025 Capítulo 3 — Sessão prática.pptx
@@ -126,7 +126,7 @@
           <a:p>
             <a:fld id="{2D806190-753F-B441-B6BD-4CD1B6C676A4}" type="datetimeFigureOut">
               <a:rPr lang="en-PT" smtClean="0"/>
-              <a:t>11/10/2025</a:t>
+              <a:t>17/04/2026</a:t>
             </a:fld>
             <a:endParaRPr lang="en-PT"/>
           </a:p>
@@ -3883,7 +3883,7 @@
             </a:pPr>
             <a:r>
               <a:rPr lang="pt-PT" dirty="0"/>
-              <a:t>Os membros de cada grupo devem reunir-se na sua sala e visitar as salas dos outros grupos para negociar.</a:t>
+              <a:t>Os representantes de cada grupo devem, à vez, negociar com os restantes grupos. </a:t>
             </a:r>
           </a:p>
           <a:p>
@@ -3964,7 +3964,7 @@
         </p:blipFill>
         <p:spPr>
           <a:xfrm>
-            <a:off x="3879850" y="5883275"/>
+            <a:off x="3879850" y="5197475"/>
             <a:ext cx="8153142" cy="3962400"/>
           </a:xfrm>
           <a:prstGeom prst="rect">
